--- a/S02/python-S02.pptx
+++ b/S02/python-S02.pptx
@@ -5,7 +5,7 @@
     <p:sldMasterId id="2147483672" r:id="rId1"/>
   </p:sldMasterIdLst>
   <p:notesMasterIdLst>
-    <p:notesMasterId r:id="rId56"/>
+    <p:notesMasterId r:id="rId58"/>
   </p:notesMasterIdLst>
   <p:sldIdLst>
     <p:sldId id="258" r:id="rId2"/>
@@ -61,7 +61,9 @@
     <p:sldId id="318" r:id="rId52"/>
     <p:sldId id="319" r:id="rId53"/>
     <p:sldId id="320" r:id="rId54"/>
-    <p:sldId id="266" r:id="rId55"/>
+    <p:sldId id="321" r:id="rId55"/>
+    <p:sldId id="322" r:id="rId56"/>
+    <p:sldId id="266" r:id="rId57"/>
   </p:sldIdLst>
   <p:sldSz cx="12192000" cy="6858000"/>
   <p:notesSz cx="6858000" cy="9144000"/>
@@ -374,7 +376,7 @@
           <a:p>
             <a:fld id="{02EF974B-A7E7-4F83-B48F-3417BE9A34E5}" type="datetimeFigureOut">
               <a:rPr lang="en-US" smtClean="0"/>
-              <a:t>11/11/2025</a:t>
+              <a:t>11/17/2025</a:t>
             </a:fld>
             <a:endParaRPr lang="en-US"/>
           </a:p>
@@ -1426,7 +1428,7 @@
           <a:p>
             <a:fld id="{1B47A3A2-ECA8-4476-8799-B477369250BE}" type="datetimeFigureOut">
               <a:rPr lang="en-US" smtClean="0"/>
-              <a:t>11/11/2025</a:t>
+              <a:t>11/17/2025</a:t>
             </a:fld>
             <a:endParaRPr lang="en-US"/>
           </a:p>
@@ -1724,7 +1726,7 @@
           <a:p>
             <a:fld id="{1B47A3A2-ECA8-4476-8799-B477369250BE}" type="datetimeFigureOut">
               <a:rPr lang="en-US" smtClean="0"/>
-              <a:t>11/11/2025</a:t>
+              <a:t>11/17/2025</a:t>
             </a:fld>
             <a:endParaRPr lang="en-US"/>
           </a:p>
@@ -1916,7 +1918,7 @@
           <a:p>
             <a:fld id="{1B47A3A2-ECA8-4476-8799-B477369250BE}" type="datetimeFigureOut">
               <a:rPr lang="en-US" smtClean="0"/>
-              <a:t>11/11/2025</a:t>
+              <a:t>11/17/2025</a:t>
             </a:fld>
             <a:endParaRPr lang="en-US"/>
           </a:p>
@@ -2177,7 +2179,7 @@
           <a:p>
             <a:fld id="{1B47A3A2-ECA8-4476-8799-B477369250BE}" type="datetimeFigureOut">
               <a:rPr lang="en-US" smtClean="0"/>
-              <a:t>11/11/2025</a:t>
+              <a:t>11/17/2025</a:t>
             </a:fld>
             <a:endParaRPr lang="en-US"/>
           </a:p>
@@ -2601,7 +2603,7 @@
           <a:p>
             <a:fld id="{1B47A3A2-ECA8-4476-8799-B477369250BE}" type="datetimeFigureOut">
               <a:rPr lang="en-US" smtClean="0"/>
-              <a:t>11/11/2025</a:t>
+              <a:t>11/17/2025</a:t>
             </a:fld>
             <a:endParaRPr lang="en-US"/>
           </a:p>
@@ -3138,7 +3140,7 @@
           <a:p>
             <a:fld id="{1B47A3A2-ECA8-4476-8799-B477369250BE}" type="datetimeFigureOut">
               <a:rPr lang="en-US" smtClean="0"/>
-              <a:t>11/11/2025</a:t>
+              <a:t>11/17/2025</a:t>
             </a:fld>
             <a:endParaRPr lang="en-US"/>
           </a:p>
@@ -4002,7 +4004,7 @@
           <a:p>
             <a:fld id="{1B47A3A2-ECA8-4476-8799-B477369250BE}" type="datetimeFigureOut">
               <a:rPr lang="en-US" smtClean="0"/>
-              <a:t>11/11/2025</a:t>
+              <a:t>11/17/2025</a:t>
             </a:fld>
             <a:endParaRPr lang="en-US"/>
           </a:p>
@@ -4172,7 +4174,7 @@
           <a:p>
             <a:fld id="{1B47A3A2-ECA8-4476-8799-B477369250BE}" type="datetimeFigureOut">
               <a:rPr lang="en-US" smtClean="0"/>
-              <a:t>11/11/2025</a:t>
+              <a:t>11/17/2025</a:t>
             </a:fld>
             <a:endParaRPr lang="en-US"/>
           </a:p>
@@ -4356,7 +4358,7 @@
           <a:p>
             <a:fld id="{1B47A3A2-ECA8-4476-8799-B477369250BE}" type="datetimeFigureOut">
               <a:rPr lang="en-US" smtClean="0"/>
-              <a:t>11/11/2025</a:t>
+              <a:t>11/17/2025</a:t>
             </a:fld>
             <a:endParaRPr lang="en-US"/>
           </a:p>
@@ -4526,7 +4528,7 @@
           <a:p>
             <a:fld id="{1B47A3A2-ECA8-4476-8799-B477369250BE}" type="datetimeFigureOut">
               <a:rPr lang="en-US" smtClean="0"/>
-              <a:t>11/11/2025</a:t>
+              <a:t>11/17/2025</a:t>
             </a:fld>
             <a:endParaRPr lang="en-US"/>
           </a:p>
@@ -4770,7 +4772,7 @@
           <a:p>
             <a:fld id="{1B47A3A2-ECA8-4476-8799-B477369250BE}" type="datetimeFigureOut">
               <a:rPr lang="en-US" smtClean="0"/>
-              <a:t>11/11/2025</a:t>
+              <a:t>11/17/2025</a:t>
             </a:fld>
             <a:endParaRPr lang="en-US"/>
           </a:p>
@@ -5006,7 +5008,7 @@
           <a:p>
             <a:fld id="{1B47A3A2-ECA8-4476-8799-B477369250BE}" type="datetimeFigureOut">
               <a:rPr lang="en-US" smtClean="0"/>
-              <a:t>11/11/2025</a:t>
+              <a:t>11/17/2025</a:t>
             </a:fld>
             <a:endParaRPr lang="en-US"/>
           </a:p>
@@ -5472,7 +5474,7 @@
           <a:p>
             <a:fld id="{1B47A3A2-ECA8-4476-8799-B477369250BE}" type="datetimeFigureOut">
               <a:rPr lang="en-US" smtClean="0"/>
-              <a:t>11/11/2025</a:t>
+              <a:t>11/17/2025</a:t>
             </a:fld>
             <a:endParaRPr lang="en-US"/>
           </a:p>
@@ -5590,7 +5592,7 @@
           <a:p>
             <a:fld id="{1B47A3A2-ECA8-4476-8799-B477369250BE}" type="datetimeFigureOut">
               <a:rPr lang="en-US" smtClean="0"/>
-              <a:t>11/11/2025</a:t>
+              <a:t>11/17/2025</a:t>
             </a:fld>
             <a:endParaRPr lang="en-US"/>
           </a:p>
@@ -5685,7 +5687,7 @@
           <a:p>
             <a:fld id="{1B47A3A2-ECA8-4476-8799-B477369250BE}" type="datetimeFigureOut">
               <a:rPr lang="en-US" smtClean="0"/>
-              <a:t>11/11/2025</a:t>
+              <a:t>11/17/2025</a:t>
             </a:fld>
             <a:endParaRPr lang="en-US"/>
           </a:p>
@@ -5940,7 +5942,7 @@
           <a:p>
             <a:fld id="{1B47A3A2-ECA8-4476-8799-B477369250BE}" type="datetimeFigureOut">
               <a:rPr lang="en-US" smtClean="0"/>
-              <a:t>11/11/2025</a:t>
+              <a:t>11/17/2025</a:t>
             </a:fld>
             <a:endParaRPr lang="en-US"/>
           </a:p>
@@ -6240,7 +6242,7 @@
           <a:p>
             <a:fld id="{1B47A3A2-ECA8-4476-8799-B477369250BE}" type="datetimeFigureOut">
               <a:rPr lang="en-US" smtClean="0"/>
-              <a:t>11/11/2025</a:t>
+              <a:t>11/17/2025</a:t>
             </a:fld>
             <a:endParaRPr lang="en-US"/>
           </a:p>
@@ -6474,7 +6476,7 @@
           <a:p>
             <a:fld id="{1B47A3A2-ECA8-4476-8799-B477369250BE}" type="datetimeFigureOut">
               <a:rPr lang="en-US" smtClean="0"/>
-              <a:t>11/11/2025</a:t>
+              <a:t>11/17/2025</a:t>
             </a:fld>
             <a:endParaRPr lang="en-US"/>
           </a:p>
@@ -17920,24 +17922,6 @@
               <a:cs typeface="IRANSans" panose="02040503050201020203" pitchFamily="18" charset="-78"/>
             </a:endParaRPr>
           </a:p>
-          <a:p>
-            <a:pPr algn="r" rtl="1">
-              <a:lnSpc>
-                <a:spcPct val="150000"/>
-              </a:lnSpc>
-            </a:pPr>
-            <a:r>
-              <a:rPr lang="en-US" sz="4400" dirty="0">
-                <a:latin typeface="IRANSans" panose="02040503050201020203" pitchFamily="18" charset="-78"/>
-                <a:cs typeface="IRANSans" panose="02040503050201020203" pitchFamily="18" charset="-78"/>
-              </a:rPr>
-              <a:t>http://10.18.241.30:3000</a:t>
-            </a:r>
-            <a:endParaRPr lang="fa-IR" sz="4400" dirty="0">
-              <a:latin typeface="IRANSans" panose="02040503050201020203" pitchFamily="18" charset="-78"/>
-              <a:cs typeface="IRANSans" panose="02040503050201020203" pitchFamily="18" charset="-78"/>
-            </a:endParaRPr>
-          </a:p>
         </p:txBody>
       </p:sp>
     </p:spTree>
@@ -18005,67 +17989,6 @@
                                           <p:spTgt spid="3">
                                             <p:txEl>
                                               <p:pRg st="0" end="0"/>
-                                            </p:txEl>
-                                          </p:spTgt>
-                                        </p:tgtEl>
-                                      </p:cBhvr>
-                                    </p:animEffect>
-                                  </p:childTnLst>
-                                </p:cTn>
-                              </p:par>
-                            </p:childTnLst>
-                          </p:cTn>
-                        </p:par>
-                      </p:childTnLst>
-                    </p:cTn>
-                  </p:par>
-                  <p:par>
-                    <p:cTn id="8" fill="hold">
-                      <p:stCondLst>
-                        <p:cond delay="indefinite"/>
-                      </p:stCondLst>
-                      <p:childTnLst>
-                        <p:par>
-                          <p:cTn id="9" fill="hold">
-                            <p:stCondLst>
-                              <p:cond delay="0"/>
-                            </p:stCondLst>
-                            <p:childTnLst>
-                              <p:par>
-                                <p:cTn id="10" presetID="10" presetClass="entr" presetSubtype="0" fill="hold" nodeType="clickEffect">
-                                  <p:stCondLst>
-                                    <p:cond delay="0"/>
-                                  </p:stCondLst>
-                                  <p:childTnLst>
-                                    <p:set>
-                                      <p:cBhvr>
-                                        <p:cTn id="11" dur="1" fill="hold">
-                                          <p:stCondLst>
-                                            <p:cond delay="0"/>
-                                          </p:stCondLst>
-                                        </p:cTn>
-                                        <p:tgtEl>
-                                          <p:spTgt spid="3">
-                                            <p:txEl>
-                                              <p:pRg st="1" end="1"/>
-                                            </p:txEl>
-                                          </p:spTgt>
-                                        </p:tgtEl>
-                                        <p:attrNameLst>
-                                          <p:attrName>style.visibility</p:attrName>
-                                        </p:attrNameLst>
-                                      </p:cBhvr>
-                                      <p:to>
-                                        <p:strVal val="visible"/>
-                                      </p:to>
-                                    </p:set>
-                                    <p:animEffect transition="in" filter="fade">
-                                      <p:cBhvr>
-                                        <p:cTn id="12" dur="500"/>
-                                        <p:tgtEl>
-                                          <p:spTgt spid="3">
-                                            <p:txEl>
-                                              <p:pRg st="1" end="1"/>
                                             </p:txEl>
                                           </p:spTgt>
                                         </p:tgtEl>
@@ -19241,6 +19164,571 @@
 </file>
 
 <file path=ppt/slides/slide54.xml><?xml version="1.0" encoding="utf-8"?>
+<p:sld xmlns:a="http://schemas.openxmlformats.org/drawingml/2006/main" xmlns:r="http://schemas.openxmlformats.org/officeDocument/2006/relationships" xmlns:p="http://schemas.openxmlformats.org/presentationml/2006/main">
+  <p:cSld>
+    <p:spTree>
+      <p:nvGrpSpPr>
+        <p:cNvPr id="1" name="">
+          <a:extLst>
+            <a:ext uri="{FF2B5EF4-FFF2-40B4-BE49-F238E27FC236}">
+              <a16:creationId xmlns:a16="http://schemas.microsoft.com/office/drawing/2014/main" id="{941BC0DF-4C03-2E22-4539-AC81D2DFD07F}"/>
+            </a:ext>
+          </a:extLst>
+        </p:cNvPr>
+        <p:cNvGrpSpPr/>
+        <p:nvPr/>
+      </p:nvGrpSpPr>
+      <p:grpSpPr>
+        <a:xfrm>
+          <a:off x="0" y="0"/>
+          <a:ext cx="0" cy="0"/>
+          <a:chOff x="0" y="0"/>
+          <a:chExt cx="0" cy="0"/>
+        </a:xfrm>
+      </p:grpSpPr>
+      <p:sp>
+        <p:nvSpPr>
+          <p:cNvPr id="2" name="Title 1">
+            <a:extLst>
+              <a:ext uri="{FF2B5EF4-FFF2-40B4-BE49-F238E27FC236}">
+                <a16:creationId xmlns:a16="http://schemas.microsoft.com/office/drawing/2014/main" id="{BAE0575F-5157-9386-DAEE-D889A434F53D}"/>
+              </a:ext>
+            </a:extLst>
+          </p:cNvPr>
+          <p:cNvSpPr>
+            <a:spLocks noGrp="1"/>
+          </p:cNvSpPr>
+          <p:nvPr>
+            <p:ph type="title"/>
+          </p:nvPr>
+        </p:nvSpPr>
+        <p:spPr/>
+        <p:txBody>
+          <a:bodyPr>
+            <a:normAutofit/>
+          </a:bodyPr>
+          <a:lstStyle/>
+          <a:p>
+            <a:pPr rtl="1"/>
+            <a:r>
+              <a:rPr lang="fa-IR" b="1" dirty="0">
+                <a:effectLst>
+                  <a:outerShdw blurRad="38100" dist="38100" dir="2700000" algn="tl">
+                    <a:srgbClr val="000000">
+                      <a:alpha val="43137"/>
+                    </a:srgbClr>
+                  </a:outerShdw>
+                </a:effectLst>
+                <a:latin typeface="IRANSans" panose="02040503050201020203" pitchFamily="18" charset="-78"/>
+                <a:cs typeface="IRANSans" panose="02040503050201020203" pitchFamily="18" charset="-78"/>
+              </a:rPr>
+              <a:t>تکلیف</a:t>
+            </a:r>
+            <a:endParaRPr lang="en-US" b="1" dirty="0">
+              <a:effectLst>
+                <a:outerShdw blurRad="38100" dist="38100" dir="2700000" algn="tl">
+                  <a:srgbClr val="000000">
+                    <a:alpha val="43137"/>
+                  </a:srgbClr>
+                </a:outerShdw>
+              </a:effectLst>
+              <a:latin typeface="IRANSans" panose="02040503050201020203" pitchFamily="18" charset="-78"/>
+              <a:cs typeface="IRANSans" panose="02040503050201020203" pitchFamily="18" charset="-78"/>
+            </a:endParaRPr>
+          </a:p>
+        </p:txBody>
+      </p:sp>
+      <p:sp>
+        <p:nvSpPr>
+          <p:cNvPr id="3" name="Content Placeholder 2">
+            <a:extLst>
+              <a:ext uri="{FF2B5EF4-FFF2-40B4-BE49-F238E27FC236}">
+                <a16:creationId xmlns:a16="http://schemas.microsoft.com/office/drawing/2014/main" id="{0EC9CB1F-7307-1CFC-E2E0-ECCF3403EE53}"/>
+              </a:ext>
+            </a:extLst>
+          </p:cNvPr>
+          <p:cNvSpPr>
+            <a:spLocks noGrp="1"/>
+          </p:cNvSpPr>
+          <p:nvPr>
+            <p:ph idx="1"/>
+          </p:nvPr>
+        </p:nvSpPr>
+        <p:spPr/>
+        <p:txBody>
+          <a:bodyPr>
+            <a:normAutofit/>
+          </a:bodyPr>
+          <a:lstStyle/>
+          <a:p>
+            <a:pPr algn="r" rtl="1">
+              <a:lnSpc>
+                <a:spcPct val="150000"/>
+              </a:lnSpc>
+            </a:pPr>
+            <a:r>
+              <a:rPr lang="fa-IR" sz="4400" dirty="0">
+                <a:latin typeface="IRANSans" panose="02040503050201020203" pitchFamily="18" charset="-78"/>
+                <a:cs typeface="IRANSans" panose="02040503050201020203" pitchFamily="18" charset="-78"/>
+              </a:rPr>
+              <a:t>برنامه ای بنویسید که عدد </a:t>
+            </a:r>
+            <a:r>
+              <a:rPr lang="en-US" sz="4400" dirty="0">
+                <a:latin typeface="IRANSans" panose="02040503050201020203" pitchFamily="18" charset="-78"/>
+                <a:cs typeface="IRANSans" panose="02040503050201020203" pitchFamily="18" charset="-78"/>
+              </a:rPr>
+              <a:t>n</a:t>
+            </a:r>
+            <a:r>
+              <a:rPr lang="fa-IR" sz="4400" dirty="0">
+                <a:latin typeface="IRANSans" panose="02040503050201020203" pitchFamily="18" charset="-78"/>
+                <a:cs typeface="IRANSans" panose="02040503050201020203" pitchFamily="18" charset="-78"/>
+              </a:rPr>
+              <a:t> </a:t>
+            </a:r>
+            <a:r>
+              <a:rPr lang="en-US" sz="4400" dirty="0">
+                <a:latin typeface="IRANSans" panose="02040503050201020203" pitchFamily="18" charset="-78"/>
+                <a:cs typeface="IRANSans" panose="02040503050201020203" pitchFamily="18" charset="-78"/>
+              </a:rPr>
+              <a:t>)</a:t>
+            </a:r>
+            <a:r>
+              <a:rPr lang="fa-IR" sz="4400" dirty="0">
+                <a:latin typeface="IRANSans" panose="02040503050201020203" pitchFamily="18" charset="-78"/>
+                <a:cs typeface="IRANSans" panose="02040503050201020203" pitchFamily="18" charset="-78"/>
+              </a:rPr>
+              <a:t>بین 3 تا 5) را از کاربر بگیرد و یک </a:t>
+            </a:r>
+            <a:r>
+              <a:rPr lang="en-US" sz="4400" dirty="0">
+                <a:latin typeface="IRANSans" panose="02040503050201020203" pitchFamily="18" charset="-78"/>
+                <a:cs typeface="IRANSans" panose="02040503050201020203" pitchFamily="18" charset="-78"/>
+              </a:rPr>
+              <a:t>n</a:t>
+            </a:r>
+            <a:r>
+              <a:rPr lang="fa-IR" sz="4400" dirty="0">
+                <a:latin typeface="IRANSans" panose="02040503050201020203" pitchFamily="18" charset="-78"/>
+                <a:cs typeface="IRANSans" panose="02040503050201020203" pitchFamily="18" charset="-78"/>
+              </a:rPr>
+              <a:t>ضلعی با استفاده از </a:t>
+            </a:r>
+            <a:r>
+              <a:rPr lang="en-US" sz="4400" dirty="0">
+                <a:latin typeface="IRANSans" panose="02040503050201020203" pitchFamily="18" charset="-78"/>
+                <a:cs typeface="IRANSans" panose="02040503050201020203" pitchFamily="18" charset="-78"/>
+              </a:rPr>
+              <a:t>turtle</a:t>
+            </a:r>
+            <a:r>
+              <a:rPr lang="fa-IR" sz="4400" dirty="0">
+                <a:latin typeface="IRANSans" panose="02040503050201020203" pitchFamily="18" charset="-78"/>
+                <a:cs typeface="IRANSans" panose="02040503050201020203" pitchFamily="18" charset="-78"/>
+              </a:rPr>
+              <a:t> رسم کند.</a:t>
+            </a:r>
+          </a:p>
+        </p:txBody>
+      </p:sp>
+    </p:spTree>
+    <p:extLst>
+      <p:ext uri="{BB962C8B-B14F-4D97-AF65-F5344CB8AC3E}">
+        <p14:creationId xmlns:p14="http://schemas.microsoft.com/office/powerpoint/2010/main" val="3687818845"/>
+      </p:ext>
+    </p:extLst>
+  </p:cSld>
+  <p:clrMapOvr>
+    <a:masterClrMapping/>
+  </p:clrMapOvr>
+  <p:timing>
+    <p:tnLst>
+      <p:par>
+        <p:cTn id="1" dur="indefinite" restart="never" nodeType="tmRoot">
+          <p:childTnLst>
+            <p:seq concurrent="1" nextAc="seek">
+              <p:cTn id="2" dur="indefinite" nodeType="mainSeq">
+                <p:childTnLst>
+                  <p:par>
+                    <p:cTn id="3" fill="hold">
+                      <p:stCondLst>
+                        <p:cond delay="indefinite"/>
+                      </p:stCondLst>
+                      <p:childTnLst>
+                        <p:par>
+                          <p:cTn id="4" fill="hold">
+                            <p:stCondLst>
+                              <p:cond delay="0"/>
+                            </p:stCondLst>
+                            <p:childTnLst>
+                              <p:par>
+                                <p:cTn id="5" presetID="10" presetClass="entr" presetSubtype="0" fill="hold" nodeType="clickEffect">
+                                  <p:stCondLst>
+                                    <p:cond delay="0"/>
+                                  </p:stCondLst>
+                                  <p:childTnLst>
+                                    <p:set>
+                                      <p:cBhvr>
+                                        <p:cTn id="6" dur="1" fill="hold">
+                                          <p:stCondLst>
+                                            <p:cond delay="0"/>
+                                          </p:stCondLst>
+                                        </p:cTn>
+                                        <p:tgtEl>
+                                          <p:spTgt spid="3">
+                                            <p:txEl>
+                                              <p:pRg st="0" end="0"/>
+                                            </p:txEl>
+                                          </p:spTgt>
+                                        </p:tgtEl>
+                                        <p:attrNameLst>
+                                          <p:attrName>style.visibility</p:attrName>
+                                        </p:attrNameLst>
+                                      </p:cBhvr>
+                                      <p:to>
+                                        <p:strVal val="visible"/>
+                                      </p:to>
+                                    </p:set>
+                                    <p:animEffect transition="in" filter="fade">
+                                      <p:cBhvr>
+                                        <p:cTn id="7" dur="500"/>
+                                        <p:tgtEl>
+                                          <p:spTgt spid="3">
+                                            <p:txEl>
+                                              <p:pRg st="0" end="0"/>
+                                            </p:txEl>
+                                          </p:spTgt>
+                                        </p:tgtEl>
+                                      </p:cBhvr>
+                                    </p:animEffect>
+                                  </p:childTnLst>
+                                </p:cTn>
+                              </p:par>
+                            </p:childTnLst>
+                          </p:cTn>
+                        </p:par>
+                      </p:childTnLst>
+                    </p:cTn>
+                  </p:par>
+                </p:childTnLst>
+              </p:cTn>
+              <p:prevCondLst>
+                <p:cond evt="onPrev" delay="0">
+                  <p:tgtEl>
+                    <p:sldTgt/>
+                  </p:tgtEl>
+                </p:cond>
+              </p:prevCondLst>
+              <p:nextCondLst>
+                <p:cond evt="onNext" delay="0">
+                  <p:tgtEl>
+                    <p:sldTgt/>
+                  </p:tgtEl>
+                </p:cond>
+              </p:nextCondLst>
+            </p:seq>
+          </p:childTnLst>
+        </p:cTn>
+      </p:par>
+    </p:tnLst>
+  </p:timing>
+</p:sld>
+</file>
+
+<file path=ppt/slides/slide55.xml><?xml version="1.0" encoding="utf-8"?>
+<p:sld xmlns:a="http://schemas.openxmlformats.org/drawingml/2006/main" xmlns:r="http://schemas.openxmlformats.org/officeDocument/2006/relationships" xmlns:p="http://schemas.openxmlformats.org/presentationml/2006/main">
+  <p:cSld>
+    <p:spTree>
+      <p:nvGrpSpPr>
+        <p:cNvPr id="1" name="">
+          <a:extLst>
+            <a:ext uri="{FF2B5EF4-FFF2-40B4-BE49-F238E27FC236}">
+              <a16:creationId xmlns:a16="http://schemas.microsoft.com/office/drawing/2014/main" id="{BE234D7C-4ABC-271D-ED5B-83548D1FA338}"/>
+            </a:ext>
+          </a:extLst>
+        </p:cNvPr>
+        <p:cNvGrpSpPr/>
+        <p:nvPr/>
+      </p:nvGrpSpPr>
+      <p:grpSpPr>
+        <a:xfrm>
+          <a:off x="0" y="0"/>
+          <a:ext cx="0" cy="0"/>
+          <a:chOff x="0" y="0"/>
+          <a:chExt cx="0" cy="0"/>
+        </a:xfrm>
+      </p:grpSpPr>
+      <p:sp>
+        <p:nvSpPr>
+          <p:cNvPr id="2" name="Title 1">
+            <a:extLst>
+              <a:ext uri="{FF2B5EF4-FFF2-40B4-BE49-F238E27FC236}">
+                <a16:creationId xmlns:a16="http://schemas.microsoft.com/office/drawing/2014/main" id="{B6CDE11A-39B3-6EF9-50DB-A643940E88BB}"/>
+              </a:ext>
+            </a:extLst>
+          </p:cNvPr>
+          <p:cNvSpPr>
+            <a:spLocks noGrp="1"/>
+          </p:cNvSpPr>
+          <p:nvPr>
+            <p:ph type="title"/>
+          </p:nvPr>
+        </p:nvSpPr>
+        <p:spPr/>
+        <p:txBody>
+          <a:bodyPr>
+            <a:normAutofit/>
+          </a:bodyPr>
+          <a:lstStyle/>
+          <a:p>
+            <a:pPr rtl="1"/>
+            <a:r>
+              <a:rPr lang="fa-IR" b="1" dirty="0">
+                <a:effectLst>
+                  <a:outerShdw blurRad="38100" dist="38100" dir="2700000" algn="tl">
+                    <a:srgbClr val="000000">
+                      <a:alpha val="43137"/>
+                    </a:srgbClr>
+                  </a:outerShdw>
+                </a:effectLst>
+                <a:latin typeface="IRANSans" panose="02040503050201020203" pitchFamily="18" charset="-78"/>
+                <a:cs typeface="IRANSans" panose="02040503050201020203" pitchFamily="18" charset="-78"/>
+              </a:rPr>
+              <a:t>تکلیف</a:t>
+            </a:r>
+            <a:endParaRPr lang="en-US" b="1" dirty="0">
+              <a:effectLst>
+                <a:outerShdw blurRad="38100" dist="38100" dir="2700000" algn="tl">
+                  <a:srgbClr val="000000">
+                    <a:alpha val="43137"/>
+                  </a:srgbClr>
+                </a:outerShdw>
+              </a:effectLst>
+              <a:latin typeface="IRANSans" panose="02040503050201020203" pitchFamily="18" charset="-78"/>
+              <a:cs typeface="IRANSans" panose="02040503050201020203" pitchFamily="18" charset="-78"/>
+            </a:endParaRPr>
+          </a:p>
+        </p:txBody>
+      </p:sp>
+      <p:sp>
+        <p:nvSpPr>
+          <p:cNvPr id="3" name="Content Placeholder 2">
+            <a:extLst>
+              <a:ext uri="{FF2B5EF4-FFF2-40B4-BE49-F238E27FC236}">
+                <a16:creationId xmlns:a16="http://schemas.microsoft.com/office/drawing/2014/main" id="{61E6B9C2-38A1-A856-BB27-F946BA30E28B}"/>
+              </a:ext>
+            </a:extLst>
+          </p:cNvPr>
+          <p:cNvSpPr>
+            <a:spLocks noGrp="1"/>
+          </p:cNvSpPr>
+          <p:nvPr>
+            <p:ph idx="1"/>
+          </p:nvPr>
+        </p:nvSpPr>
+        <p:spPr/>
+        <p:txBody>
+          <a:bodyPr>
+            <a:normAutofit/>
+          </a:bodyPr>
+          <a:lstStyle/>
+          <a:p>
+            <a:pPr algn="r" rtl="1">
+              <a:lnSpc>
+                <a:spcPct val="150000"/>
+              </a:lnSpc>
+            </a:pPr>
+            <a:r>
+              <a:rPr lang="fa-IR" sz="4400" dirty="0">
+                <a:latin typeface="IRANSans" panose="02040503050201020203" pitchFamily="18" charset="-78"/>
+                <a:cs typeface="IRANSans" panose="02040503050201020203" pitchFamily="18" charset="-78"/>
+              </a:rPr>
+              <a:t>یک تاس را شبیه سازی کنید.</a:t>
+            </a:r>
+          </a:p>
+          <a:p>
+            <a:pPr algn="r" rtl="1">
+              <a:lnSpc>
+                <a:spcPct val="150000"/>
+              </a:lnSpc>
+            </a:pPr>
+            <a:r>
+              <a:rPr lang="fa-IR" sz="4400" dirty="0">
+                <a:latin typeface="IRANSans" panose="02040503050201020203" pitchFamily="18" charset="-78"/>
+                <a:cs typeface="IRANSans" panose="02040503050201020203" pitchFamily="18" charset="-78"/>
+              </a:rPr>
+              <a:t>یک سکه را شبیه سازی کنید.</a:t>
+            </a:r>
+          </a:p>
+        </p:txBody>
+      </p:sp>
+    </p:spTree>
+    <p:extLst>
+      <p:ext uri="{BB962C8B-B14F-4D97-AF65-F5344CB8AC3E}">
+        <p14:creationId xmlns:p14="http://schemas.microsoft.com/office/powerpoint/2010/main" val="520005420"/>
+      </p:ext>
+    </p:extLst>
+  </p:cSld>
+  <p:clrMapOvr>
+    <a:masterClrMapping/>
+  </p:clrMapOvr>
+  <p:timing>
+    <p:tnLst>
+      <p:par>
+        <p:cTn id="1" dur="indefinite" restart="never" nodeType="tmRoot">
+          <p:childTnLst>
+            <p:seq concurrent="1" nextAc="seek">
+              <p:cTn id="2" dur="indefinite" nodeType="mainSeq">
+                <p:childTnLst>
+                  <p:par>
+                    <p:cTn id="3" fill="hold">
+                      <p:stCondLst>
+                        <p:cond delay="indefinite"/>
+                      </p:stCondLst>
+                      <p:childTnLst>
+                        <p:par>
+                          <p:cTn id="4" fill="hold">
+                            <p:stCondLst>
+                              <p:cond delay="0"/>
+                            </p:stCondLst>
+                            <p:childTnLst>
+                              <p:par>
+                                <p:cTn id="5" presetID="10" presetClass="entr" presetSubtype="0" fill="hold" nodeType="clickEffect">
+                                  <p:stCondLst>
+                                    <p:cond delay="0"/>
+                                  </p:stCondLst>
+                                  <p:childTnLst>
+                                    <p:set>
+                                      <p:cBhvr>
+                                        <p:cTn id="6" dur="1" fill="hold">
+                                          <p:stCondLst>
+                                            <p:cond delay="0"/>
+                                          </p:stCondLst>
+                                        </p:cTn>
+                                        <p:tgtEl>
+                                          <p:spTgt spid="3">
+                                            <p:txEl>
+                                              <p:pRg st="0" end="0"/>
+                                            </p:txEl>
+                                          </p:spTgt>
+                                        </p:tgtEl>
+                                        <p:attrNameLst>
+                                          <p:attrName>style.visibility</p:attrName>
+                                        </p:attrNameLst>
+                                      </p:cBhvr>
+                                      <p:to>
+                                        <p:strVal val="visible"/>
+                                      </p:to>
+                                    </p:set>
+                                    <p:animEffect transition="in" filter="fade">
+                                      <p:cBhvr>
+                                        <p:cTn id="7" dur="500"/>
+                                        <p:tgtEl>
+                                          <p:spTgt spid="3">
+                                            <p:txEl>
+                                              <p:pRg st="0" end="0"/>
+                                            </p:txEl>
+                                          </p:spTgt>
+                                        </p:tgtEl>
+                                      </p:cBhvr>
+                                    </p:animEffect>
+                                  </p:childTnLst>
+                                </p:cTn>
+                              </p:par>
+                            </p:childTnLst>
+                          </p:cTn>
+                        </p:par>
+                      </p:childTnLst>
+                    </p:cTn>
+                  </p:par>
+                  <p:par>
+                    <p:cTn id="8" fill="hold">
+                      <p:stCondLst>
+                        <p:cond delay="indefinite"/>
+                      </p:stCondLst>
+                      <p:childTnLst>
+                        <p:par>
+                          <p:cTn id="9" fill="hold">
+                            <p:stCondLst>
+                              <p:cond delay="0"/>
+                            </p:stCondLst>
+                            <p:childTnLst>
+                              <p:par>
+                                <p:cTn id="10" presetID="10" presetClass="entr" presetSubtype="0" fill="hold" nodeType="clickEffect">
+                                  <p:stCondLst>
+                                    <p:cond delay="0"/>
+                                  </p:stCondLst>
+                                  <p:childTnLst>
+                                    <p:set>
+                                      <p:cBhvr>
+                                        <p:cTn id="11" dur="1" fill="hold">
+                                          <p:stCondLst>
+                                            <p:cond delay="0"/>
+                                          </p:stCondLst>
+                                        </p:cTn>
+                                        <p:tgtEl>
+                                          <p:spTgt spid="3">
+                                            <p:txEl>
+                                              <p:pRg st="1" end="1"/>
+                                            </p:txEl>
+                                          </p:spTgt>
+                                        </p:tgtEl>
+                                        <p:attrNameLst>
+                                          <p:attrName>style.visibility</p:attrName>
+                                        </p:attrNameLst>
+                                      </p:cBhvr>
+                                      <p:to>
+                                        <p:strVal val="visible"/>
+                                      </p:to>
+                                    </p:set>
+                                    <p:animEffect transition="in" filter="fade">
+                                      <p:cBhvr>
+                                        <p:cTn id="12" dur="500"/>
+                                        <p:tgtEl>
+                                          <p:spTgt spid="3">
+                                            <p:txEl>
+                                              <p:pRg st="1" end="1"/>
+                                            </p:txEl>
+                                          </p:spTgt>
+                                        </p:tgtEl>
+                                      </p:cBhvr>
+                                    </p:animEffect>
+                                  </p:childTnLst>
+                                </p:cTn>
+                              </p:par>
+                            </p:childTnLst>
+                          </p:cTn>
+                        </p:par>
+                      </p:childTnLst>
+                    </p:cTn>
+                  </p:par>
+                </p:childTnLst>
+              </p:cTn>
+              <p:prevCondLst>
+                <p:cond evt="onPrev" delay="0">
+                  <p:tgtEl>
+                    <p:sldTgt/>
+                  </p:tgtEl>
+                </p:cond>
+              </p:prevCondLst>
+              <p:nextCondLst>
+                <p:cond evt="onNext" delay="0">
+                  <p:tgtEl>
+                    <p:sldTgt/>
+                  </p:tgtEl>
+                </p:cond>
+              </p:nextCondLst>
+            </p:seq>
+          </p:childTnLst>
+        </p:cTn>
+      </p:par>
+    </p:tnLst>
+  </p:timing>
+</p:sld>
+</file>
+
+<file path=ppt/slides/slide56.xml><?xml version="1.0" encoding="utf-8"?>
 <p:sld xmlns:a="http://schemas.openxmlformats.org/drawingml/2006/main" xmlns:r="http://schemas.openxmlformats.org/officeDocument/2006/relationships" xmlns:p="http://schemas.openxmlformats.org/presentationml/2006/main">
   <p:cSld>
     <p:spTree>
